--- a/public/teach/decks/agent-skills-301.pptx
+++ b/public/teach/decks/agent-skills-301.pptx
@@ -3145,8 +3145,8 @@
         </p:nvSpPr>
         <p:spPr>
           <a:xfrm>
-            <a:off x="822960" y="1920240"/>
-            <a:ext cx="10515600" cy="1828800"/>
+            <a:off x="822960" y="1874519"/>
+            <a:ext cx="10607040" cy="1920240"/>
           </a:xfrm>
           <a:prstGeom prst="rect">
             <a:avLst/>
@@ -3165,7 +3165,7 @@
               </a:lnSpc>
             </a:pPr>
             <a:r>
-              <a:rPr sz="6600" b="1">
+              <a:rPr sz="5800" b="1">
                 <a:solidFill>
                   <a:srgbClr val="FFFFFF"/>
                 </a:solidFill>
@@ -3184,8 +3184,8 @@
         </p:nvSpPr>
         <p:spPr>
           <a:xfrm>
-            <a:off x="822960" y="3840480"/>
-            <a:ext cx="8686800" cy="1188720"/>
+            <a:off x="822960" y="3886200"/>
+            <a:ext cx="9144000" cy="1188720"/>
           </a:xfrm>
           <a:prstGeom prst="rect">
             <a:avLst/>
@@ -3204,7 +3204,7 @@
               </a:lnSpc>
             </a:pPr>
             <a:r>
-              <a:rPr sz="2400" b="0">
+              <a:rPr sz="2300" b="0">
                 <a:solidFill>
                   <a:srgbClr val="A1A1A1"/>
                 </a:solidFill>
@@ -3223,8 +3223,8 @@
         </p:nvSpPr>
         <p:spPr>
           <a:xfrm>
-            <a:off x="822960" y="5212080"/>
-            <a:ext cx="8229600" cy="548640"/>
+            <a:off x="822960" y="5257800"/>
+            <a:ext cx="9144000" cy="548640"/>
           </a:xfrm>
           <a:prstGeom prst="rect">
             <a:avLst/>
@@ -3432,8 +3432,8 @@
         </p:nvSpPr>
         <p:spPr>
           <a:xfrm>
-            <a:off x="822960" y="1280160"/>
-            <a:ext cx="10515600" cy="822960"/>
+            <a:off x="822960" y="1207008"/>
+            <a:ext cx="10515600" cy="731520"/>
           </a:xfrm>
           <a:prstGeom prst="rect">
             <a:avLst/>
@@ -3448,7 +3448,7 @@
           <a:p>
             <a:pPr algn="l"/>
             <a:r>
-              <a:rPr sz="3400" b="1">
+              <a:rPr sz="3000" b="1">
                 <a:solidFill>
                   <a:srgbClr val="FFFFFF"/>
                 </a:solidFill>
@@ -3475,8 +3475,8 @@
         </p:blipFill>
         <p:spPr>
           <a:xfrm>
-            <a:off x="822960" y="2148840"/>
-            <a:ext cx="9052560" cy="5092065"/>
+            <a:off x="2804008" y="2057400"/>
+            <a:ext cx="6583680" cy="3703320"/>
           </a:xfrm>
           <a:prstGeom prst="rect">
             <a:avLst/>
@@ -3491,8 +3491,8 @@
         </p:nvSpPr>
         <p:spPr>
           <a:xfrm>
-            <a:off x="822960" y="5806440"/>
-            <a:ext cx="10424160" cy="548640"/>
+            <a:off x="822960" y="5943600"/>
+            <a:ext cx="10515600" cy="457200"/>
           </a:xfrm>
           <a:prstGeom prst="rect">
             <a:avLst/>
@@ -3505,9 +3505,9 @@
           </a:bodyPr>
           <a:lstStyle/>
           <a:p>
-            <a:pPr algn="l"/>
-            <a:r>
-              <a:rPr sz="1500" b="0">
+            <a:pPr algn="ctr"/>
+            <a:r>
+              <a:rPr sz="1400" b="0">
                 <a:solidFill>
                   <a:srgbClr val="7D7D7D"/>
                 </a:solidFill>
@@ -3700,8 +3700,8 @@
         </p:nvSpPr>
         <p:spPr>
           <a:xfrm>
-            <a:off x="822960" y="1280160"/>
-            <a:ext cx="10515600" cy="822960"/>
+            <a:off x="822960" y="1207008"/>
+            <a:ext cx="10515600" cy="731520"/>
           </a:xfrm>
           <a:prstGeom prst="rect">
             <a:avLst/>
@@ -3716,7 +3716,7 @@
           <a:p>
             <a:pPr algn="l"/>
             <a:r>
-              <a:rPr sz="3400" b="1">
+              <a:rPr sz="3000" b="1">
                 <a:solidFill>
                   <a:srgbClr val="FFFFFF"/>
                 </a:solidFill>
@@ -3743,8 +3743,8 @@
         </p:blipFill>
         <p:spPr>
           <a:xfrm>
-            <a:off x="822960" y="2148840"/>
-            <a:ext cx="9052560" cy="5092065"/>
+            <a:off x="2804008" y="2057400"/>
+            <a:ext cx="6583680" cy="3703320"/>
           </a:xfrm>
           <a:prstGeom prst="rect">
             <a:avLst/>
@@ -3759,8 +3759,8 @@
         </p:nvSpPr>
         <p:spPr>
           <a:xfrm>
-            <a:off x="822960" y="5806440"/>
-            <a:ext cx="10424160" cy="548640"/>
+            <a:off x="822960" y="5943600"/>
+            <a:ext cx="10515600" cy="457200"/>
           </a:xfrm>
           <a:prstGeom prst="rect">
             <a:avLst/>
@@ -3773,9 +3773,9 @@
           </a:bodyPr>
           <a:lstStyle/>
           <a:p>
-            <a:pPr algn="l"/>
-            <a:r>
-              <a:rPr sz="1500" b="0">
+            <a:pPr algn="ctr"/>
+            <a:r>
+              <a:rPr sz="1400" b="0">
                 <a:solidFill>
                   <a:srgbClr val="7D7D7D"/>
                 </a:solidFill>
@@ -3968,8 +3968,8 @@
         </p:nvSpPr>
         <p:spPr>
           <a:xfrm>
-            <a:off x="822960" y="1371600"/>
-            <a:ext cx="10515600" cy="1097280"/>
+            <a:off x="822960" y="1325880"/>
+            <a:ext cx="10607040" cy="1005840"/>
           </a:xfrm>
           <a:prstGeom prst="rect">
             <a:avLst/>
@@ -3988,7 +3988,7 @@
               </a:lnSpc>
             </a:pPr>
             <a:r>
-              <a:rPr sz="4000" b="1">
+              <a:rPr sz="3600" b="1">
                 <a:solidFill>
                   <a:srgbClr val="FFFFFF"/>
                 </a:solidFill>
@@ -4007,8 +4007,8 @@
         </p:nvSpPr>
         <p:spPr>
           <a:xfrm>
-            <a:off x="822960" y="2743200"/>
-            <a:ext cx="10424160" cy="3291840"/>
+            <a:off x="822960" y="2606040"/>
+            <a:ext cx="10515600" cy="3566160"/>
           </a:xfrm>
           <a:prstGeom prst="rect">
             <a:avLst/>
@@ -4023,14 +4023,14 @@
           <a:p>
             <a:pPr>
               <a:lnSpc>
-                <a:spcPct val="115000"/>
+                <a:spcPct val="112000"/>
               </a:lnSpc>
               <a:spcAft>
-                <a:spcPts val="1400"/>
+                <a:spcPts val="1000"/>
               </a:spcAft>
             </a:pPr>
             <a:r>
-              <a:rPr sz="2200">
+              <a:rPr sz="1900">
                 <a:solidFill>
                   <a:srgbClr val="F56BA0"/>
                 </a:solidFill>
@@ -4039,7 +4039,7 @@
               <a:t>-  </a:t>
             </a:r>
             <a:r>
-              <a:rPr sz="2200">
+              <a:rPr sz="1900">
                 <a:solidFill>
                   <a:srgbClr val="EDEDED"/>
                 </a:solidFill>
@@ -4051,14 +4051,14 @@
           <a:p>
             <a:pPr>
               <a:lnSpc>
-                <a:spcPct val="115000"/>
+                <a:spcPct val="112000"/>
               </a:lnSpc>
               <a:spcAft>
-                <a:spcPts val="1400"/>
+                <a:spcPts val="1000"/>
               </a:spcAft>
             </a:pPr>
             <a:r>
-              <a:rPr sz="2200">
+              <a:rPr sz="1900">
                 <a:solidFill>
                   <a:srgbClr val="F56BA0"/>
                 </a:solidFill>
@@ -4067,7 +4067,7 @@
               <a:t>-  </a:t>
             </a:r>
             <a:r>
-              <a:rPr sz="2200">
+              <a:rPr sz="1900">
                 <a:solidFill>
                   <a:srgbClr val="EDEDED"/>
                 </a:solidFill>
@@ -4079,14 +4079,14 @@
           <a:p>
             <a:pPr>
               <a:lnSpc>
-                <a:spcPct val="115000"/>
+                <a:spcPct val="112000"/>
               </a:lnSpc>
               <a:spcAft>
-                <a:spcPts val="1400"/>
+                <a:spcPts val="1000"/>
               </a:spcAft>
             </a:pPr>
             <a:r>
-              <a:rPr sz="2200">
+              <a:rPr sz="1900">
                 <a:solidFill>
                   <a:srgbClr val="F56BA0"/>
                 </a:solidFill>
@@ -4095,7 +4095,7 @@
               <a:t>-  </a:t>
             </a:r>
             <a:r>
-              <a:rPr sz="2200">
+              <a:rPr sz="1900">
                 <a:solidFill>
                   <a:srgbClr val="EDEDED"/>
                 </a:solidFill>
@@ -4107,14 +4107,14 @@
           <a:p>
             <a:pPr>
               <a:lnSpc>
-                <a:spcPct val="115000"/>
+                <a:spcPct val="112000"/>
               </a:lnSpc>
               <a:spcAft>
-                <a:spcPts val="1400"/>
+                <a:spcPts val="1000"/>
               </a:spcAft>
             </a:pPr>
             <a:r>
-              <a:rPr sz="2200">
+              <a:rPr sz="1900">
                 <a:solidFill>
                   <a:srgbClr val="F56BA0"/>
                 </a:solidFill>
@@ -4123,7 +4123,7 @@
               <a:t>-  </a:t>
             </a:r>
             <a:r>
-              <a:rPr sz="2200">
+              <a:rPr sz="1900">
                 <a:solidFill>
                   <a:srgbClr val="EDEDED"/>
                 </a:solidFill>
@@ -4316,8 +4316,8 @@
         </p:nvSpPr>
         <p:spPr>
           <a:xfrm>
-            <a:off x="822960" y="1371600"/>
-            <a:ext cx="10515600" cy="1097280"/>
+            <a:off x="822960" y="1325880"/>
+            <a:ext cx="10607040" cy="1005840"/>
           </a:xfrm>
           <a:prstGeom prst="rect">
             <a:avLst/>
@@ -4336,7 +4336,7 @@
               </a:lnSpc>
             </a:pPr>
             <a:r>
-              <a:rPr sz="4000" b="1">
+              <a:rPr sz="3600" b="1">
                 <a:solidFill>
                   <a:srgbClr val="FFFFFF"/>
                 </a:solidFill>
@@ -4355,8 +4355,8 @@
         </p:nvSpPr>
         <p:spPr>
           <a:xfrm>
-            <a:off x="822960" y="2743200"/>
-            <a:ext cx="10424160" cy="3291840"/>
+            <a:off x="822960" y="2606040"/>
+            <a:ext cx="10515600" cy="3566160"/>
           </a:xfrm>
           <a:prstGeom prst="rect">
             <a:avLst/>
@@ -4371,14 +4371,14 @@
           <a:p>
             <a:pPr>
               <a:lnSpc>
-                <a:spcPct val="115000"/>
+                <a:spcPct val="112000"/>
               </a:lnSpc>
               <a:spcAft>
-                <a:spcPts val="1400"/>
+                <a:spcPts val="1000"/>
               </a:spcAft>
             </a:pPr>
             <a:r>
-              <a:rPr sz="2200">
+              <a:rPr sz="1900">
                 <a:solidFill>
                   <a:srgbClr val="F56BA0"/>
                 </a:solidFill>
@@ -4387,7 +4387,7 @@
               <a:t>-  </a:t>
             </a:r>
             <a:r>
-              <a:rPr sz="2200">
+              <a:rPr sz="1900">
                 <a:solidFill>
                   <a:srgbClr val="EDEDED"/>
                 </a:solidFill>
@@ -4399,14 +4399,14 @@
           <a:p>
             <a:pPr>
               <a:lnSpc>
-                <a:spcPct val="115000"/>
+                <a:spcPct val="112000"/>
               </a:lnSpc>
               <a:spcAft>
-                <a:spcPts val="1400"/>
+                <a:spcPts val="1000"/>
               </a:spcAft>
             </a:pPr>
             <a:r>
-              <a:rPr sz="2200">
+              <a:rPr sz="1900">
                 <a:solidFill>
                   <a:srgbClr val="F56BA0"/>
                 </a:solidFill>
@@ -4415,7 +4415,7 @@
               <a:t>-  </a:t>
             </a:r>
             <a:r>
-              <a:rPr sz="2200">
+              <a:rPr sz="1900">
                 <a:solidFill>
                   <a:srgbClr val="EDEDED"/>
                 </a:solidFill>
@@ -4427,14 +4427,14 @@
           <a:p>
             <a:pPr>
               <a:lnSpc>
-                <a:spcPct val="115000"/>
+                <a:spcPct val="112000"/>
               </a:lnSpc>
               <a:spcAft>
-                <a:spcPts val="1400"/>
+                <a:spcPts val="1000"/>
               </a:spcAft>
             </a:pPr>
             <a:r>
-              <a:rPr sz="2200">
+              <a:rPr sz="1900">
                 <a:solidFill>
                   <a:srgbClr val="F56BA0"/>
                 </a:solidFill>
@@ -4443,7 +4443,7 @@
               <a:t>-  </a:t>
             </a:r>
             <a:r>
-              <a:rPr sz="2200">
+              <a:rPr sz="1900">
                 <a:solidFill>
                   <a:srgbClr val="EDEDED"/>
                 </a:solidFill>
@@ -4455,14 +4455,14 @@
           <a:p>
             <a:pPr>
               <a:lnSpc>
-                <a:spcPct val="115000"/>
+                <a:spcPct val="112000"/>
               </a:lnSpc>
               <a:spcAft>
-                <a:spcPts val="1400"/>
+                <a:spcPts val="1000"/>
               </a:spcAft>
             </a:pPr>
             <a:r>
-              <a:rPr sz="2200">
+              <a:rPr sz="1900">
                 <a:solidFill>
                   <a:srgbClr val="F56BA0"/>
                 </a:solidFill>
@@ -4471,7 +4471,7 @@
               <a:t>-  </a:t>
             </a:r>
             <a:r>
-              <a:rPr sz="2200">
+              <a:rPr sz="1900">
                 <a:solidFill>
                   <a:srgbClr val="EDEDED"/>
                 </a:solidFill>
@@ -4664,8 +4664,8 @@
         </p:nvSpPr>
         <p:spPr>
           <a:xfrm>
-            <a:off x="822960" y="1371600"/>
-            <a:ext cx="10515600" cy="1097280"/>
+            <a:off x="822960" y="1325880"/>
+            <a:ext cx="10607040" cy="1005840"/>
           </a:xfrm>
           <a:prstGeom prst="rect">
             <a:avLst/>
@@ -4684,7 +4684,7 @@
               </a:lnSpc>
             </a:pPr>
             <a:r>
-              <a:rPr sz="4000" b="1">
+              <a:rPr sz="3600" b="1">
                 <a:solidFill>
                   <a:srgbClr val="FFFFFF"/>
                 </a:solidFill>
@@ -4703,8 +4703,8 @@
         </p:nvSpPr>
         <p:spPr>
           <a:xfrm>
-            <a:off x="822960" y="2743200"/>
-            <a:ext cx="10424160" cy="3291840"/>
+            <a:off x="822960" y="2606040"/>
+            <a:ext cx="10515600" cy="3566160"/>
           </a:xfrm>
           <a:prstGeom prst="rect">
             <a:avLst/>
@@ -4719,14 +4719,14 @@
           <a:p>
             <a:pPr>
               <a:lnSpc>
-                <a:spcPct val="115000"/>
+                <a:spcPct val="112000"/>
               </a:lnSpc>
               <a:spcAft>
-                <a:spcPts val="1400"/>
+                <a:spcPts val="1000"/>
               </a:spcAft>
             </a:pPr>
             <a:r>
-              <a:rPr sz="2200">
+              <a:rPr sz="1900">
                 <a:solidFill>
                   <a:srgbClr val="F56BA0"/>
                 </a:solidFill>
@@ -4735,7 +4735,7 @@
               <a:t>-  </a:t>
             </a:r>
             <a:r>
-              <a:rPr sz="2200">
+              <a:rPr sz="1900">
                 <a:solidFill>
                   <a:srgbClr val="EDEDED"/>
                 </a:solidFill>
@@ -4747,14 +4747,14 @@
           <a:p>
             <a:pPr>
               <a:lnSpc>
-                <a:spcPct val="115000"/>
+                <a:spcPct val="112000"/>
               </a:lnSpc>
               <a:spcAft>
-                <a:spcPts val="1400"/>
+                <a:spcPts val="1000"/>
               </a:spcAft>
             </a:pPr>
             <a:r>
-              <a:rPr sz="2200">
+              <a:rPr sz="1900">
                 <a:solidFill>
                   <a:srgbClr val="F56BA0"/>
                 </a:solidFill>
@@ -4763,7 +4763,7 @@
               <a:t>-  </a:t>
             </a:r>
             <a:r>
-              <a:rPr sz="2200">
+              <a:rPr sz="1900">
                 <a:solidFill>
                   <a:srgbClr val="EDEDED"/>
                 </a:solidFill>
@@ -4775,14 +4775,14 @@
           <a:p>
             <a:pPr>
               <a:lnSpc>
-                <a:spcPct val="115000"/>
+                <a:spcPct val="112000"/>
               </a:lnSpc>
               <a:spcAft>
-                <a:spcPts val="1400"/>
+                <a:spcPts val="1000"/>
               </a:spcAft>
             </a:pPr>
             <a:r>
-              <a:rPr sz="2200">
+              <a:rPr sz="1900">
                 <a:solidFill>
                   <a:srgbClr val="F56BA0"/>
                 </a:solidFill>
@@ -4791,7 +4791,7 @@
               <a:t>-  </a:t>
             </a:r>
             <a:r>
-              <a:rPr sz="2200">
+              <a:rPr sz="1900">
                 <a:solidFill>
                   <a:srgbClr val="EDEDED"/>
                 </a:solidFill>
@@ -4803,14 +4803,14 @@
           <a:p>
             <a:pPr>
               <a:lnSpc>
-                <a:spcPct val="115000"/>
+                <a:spcPct val="112000"/>
               </a:lnSpc>
               <a:spcAft>
-                <a:spcPts val="1400"/>
+                <a:spcPts val="1000"/>
               </a:spcAft>
             </a:pPr>
             <a:r>
-              <a:rPr sz="2200">
+              <a:rPr sz="1900">
                 <a:solidFill>
                   <a:srgbClr val="F56BA0"/>
                 </a:solidFill>
@@ -4819,7 +4819,7 @@
               <a:t>-  </a:t>
             </a:r>
             <a:r>
-              <a:rPr sz="2200">
+              <a:rPr sz="1900">
                 <a:solidFill>
                   <a:srgbClr val="EDEDED"/>
                 </a:solidFill>
@@ -4977,7 +4977,7 @@
         </p:nvSpPr>
         <p:spPr>
           <a:xfrm>
-            <a:off x="1097280" y="1828800"/>
+            <a:off x="1097280" y="1783080"/>
             <a:ext cx="9966960" cy="1828800"/>
           </a:xfrm>
           <a:prstGeom prst="rect">
@@ -4997,7 +4997,7 @@
               </a:lnSpc>
             </a:pPr>
             <a:r>
-              <a:rPr sz="4400" b="1">
+              <a:rPr sz="4000" b="1">
                 <a:solidFill>
                   <a:srgbClr val="FFFFFF"/>
                 </a:solidFill>
